--- a/dist/초2/국어/기초문해/초2_국어_기초문해_03_짧은글읽고내용확인_학생용.pptx
+++ b/dist/초2/국어/기초문해/초2_국어_기초문해_03_짧은글읽고내용확인_학생용.pptx
@@ -118,44 +118,44 @@
   <p:extLst>
     <p:ext uri="{521415D9-36F7-43E2-AB2F-B90AF26B5E84}">
       <p14:sectionLst xmlns:p14="http://schemas.microsoft.com/office/powerpoint/2010/main">
-        <p14:section name="도입" id="{229ff6c6-2fc1-af36-53a4-d2989ef04ca6}">
+        <p14:section name="도입" id="{7f45c71f-4a75-cd1e-c260-f37f2dc3f910}">
           <p14:sldIdLst>
             <p14:sldId id="256"/>
             <p14:sldId id="257"/>
           </p14:sldIdLst>
         </p14:section>
-        <p14:section name="개념" id="{6574c91e-a1fa-4acf-80f2-b8adcc971e79}">
+        <p14:section name="개념" id="{99ddc1b4-dc8a-9e3d-63b4-8939f27e08d9}">
           <p14:sldIdLst>
             <p14:sldId id="258"/>
             <p14:sldId id="260"/>
             <p14:sldId id="261"/>
           </p14:sldIdLst>
         </p14:section>
-        <p14:section name="연습" id="{a1058fa9-ec38-05ac-5da1-1270af150222}">
+        <p14:section name="연습" id="{b225b813-0ed0-1cd5-59a8-81fe5c2409e4}">
           <p14:sldIdLst>
             <p14:sldId id="259"/>
             <p14:sldId id="262"/>
             <p14:sldId id="263"/>
           </p14:sldIdLst>
         </p14:section>
-        <p14:section name="개념" id="{8deb2c80-2458-ba31-f8c1-3cc4ec46008a}">
+        <p14:section name="개념" id="{d8fca5bb-ef65-bde0-6691-928599a42cb7}">
           <p14:sldIdLst/>
         </p14:section>
-        <p14:section name="연습" id="{ba2333fe-1c32-6b2b-ec0e-75ee5c81cf27}">
+        <p14:section name="연습" id="{bfb92615-ef67-15a6-4623-67bd6a2c9bf6}">
           <p14:sldIdLst/>
         </p14:section>
-        <p14:section name="확인" id="{33995237-8dbf-5990-026c-dd0c4d3eb1bc}">
+        <p14:section name="확인" id="{a742c30e-cde6-04ed-2d75-a85fab980811}">
           <p14:sldIdLst>
             <p14:sldId id="264"/>
             <p14:sldId id="265"/>
           </p14:sldIdLst>
         </p14:section>
-        <p14:section name="정리" id="{d96627ed-6239-9d38-1c7d-67ff8c528798}">
+        <p14:section name="정리" id="{767fba10-ac23-c5e5-f557-4621a10cf4ea}">
           <p14:sldIdLst>
             <p14:sldId id="266"/>
           </p14:sldIdLst>
         </p14:section>
-        <p14:section name="보충" id="{65c1b1df-ba06-144a-aeb0-192469df6358}">
+        <p14:section name="보충" id="{f3ac690b-8b32-a376-61ba-bfc3974ed7b0}">
           <p14:sldIdLst>
             <p14:sldId id="267"/>
           </p14:sldIdLst>

--- a/dist/초2/국어/기초문해/초2_국어_기초문해_03_짧은글읽고내용확인_학생용.pptx
+++ b/dist/초2/국어/기초문해/초2_국어_기초문해_03_짧은글읽고내용확인_학생용.pptx
@@ -118,44 +118,44 @@
   <p:extLst>
     <p:ext uri="{521415D9-36F7-43E2-AB2F-B90AF26B5E84}">
       <p14:sectionLst xmlns:p14="http://schemas.microsoft.com/office/powerpoint/2010/main">
-        <p14:section name="도입" id="{7f45c71f-4a75-cd1e-c260-f37f2dc3f910}">
+        <p14:section name="도입" id="{68526218-d2fc-ac45-e374-2c0dc197b85d}">
           <p14:sldIdLst>
             <p14:sldId id="256"/>
             <p14:sldId id="257"/>
           </p14:sldIdLst>
         </p14:section>
-        <p14:section name="개념" id="{99ddc1b4-dc8a-9e3d-63b4-8939f27e08d9}">
+        <p14:section name="개념" id="{76cd031f-d371-2437-4841-e31d85cae633}">
           <p14:sldIdLst>
             <p14:sldId id="258"/>
             <p14:sldId id="260"/>
             <p14:sldId id="261"/>
           </p14:sldIdLst>
         </p14:section>
-        <p14:section name="연습" id="{b225b813-0ed0-1cd5-59a8-81fe5c2409e4}">
+        <p14:section name="연습" id="{85b804fd-13e7-55c8-4e85-78f1d9e6af3e}">
           <p14:sldIdLst>
             <p14:sldId id="259"/>
             <p14:sldId id="262"/>
             <p14:sldId id="263"/>
           </p14:sldIdLst>
         </p14:section>
-        <p14:section name="개념" id="{d8fca5bb-ef65-bde0-6691-928599a42cb7}">
+        <p14:section name="개념" id="{89812f63-ecf4-2973-def7-ea08f892dfd7}">
           <p14:sldIdLst/>
         </p14:section>
-        <p14:section name="연습" id="{bfb92615-ef67-15a6-4623-67bd6a2c9bf6}">
+        <p14:section name="연습" id="{816b2a02-1636-fa29-602a-fd9a41a002ee}">
           <p14:sldIdLst/>
         </p14:section>
-        <p14:section name="확인" id="{a742c30e-cde6-04ed-2d75-a85fab980811}">
+        <p14:section name="확인" id="{92167a85-429f-6396-b96a-544ebe3b3262}">
           <p14:sldIdLst>
             <p14:sldId id="264"/>
             <p14:sldId id="265"/>
           </p14:sldIdLst>
         </p14:section>
-        <p14:section name="정리" id="{767fba10-ac23-c5e5-f557-4621a10cf4ea}">
+        <p14:section name="정리" id="{8510e809-953b-33c7-09bb-c6162bb7ecf2}">
           <p14:sldIdLst>
             <p14:sldId id="266"/>
           </p14:sldIdLst>
         </p14:section>
-        <p14:section name="보충" id="{f3ac690b-8b32-a376-61ba-bfc3974ed7b0}">
+        <p14:section name="보충" id="{a35baf9f-fd77-15f4-8c5b-345b313eb636}">
           <p14:sldIdLst>
             <p14:sldId id="267"/>
           </p14:sldIdLst>
